--- a/Projeto_Final_Artefatos/InsurMinds_Projeto_Final.pptx
+++ b/Projeto_Final_Artefatos/InsurMinds_Projeto_Final.pptx
@@ -5053,7 +5053,7 @@
                 </a:solidFill>
                 <a:latin typeface="Segoe UI"/>
               </a:rPr>
-              <a:t>🚧  Extração com LLM em desenvolvimento</a:t>
+              <a:t>🚧  Sem a especificação, não há número para comparar</a:t>
             </a:r>
           </a:p>
         </p:txBody>
@@ -5092,7 +5092,7 @@
                 </a:solidFill>
                 <a:latin typeface="Segoe UI"/>
               </a:rPr>
-              <a:t>A frente B ainda não está pronta: a demonstração usa extrações de exemplo, identificadas como tal na tela, no console e no relatório.</a:t>
+              <a:t>As condições gerais remetem LMI, franquia, vigência, retroatividade e sublimites à Especificação da Apólice, que não está no lote. A extração com modelo de linguagem acha a cláusula e cita a página; comparar número fica para quando ela entrar.</a:t>
             </a:r>
           </a:p>
         </p:txBody>
@@ -9666,7 +9666,7 @@
                 </a:solidFill>
                 <a:latin typeface="Segoe UI"/>
               </a:rPr>
-              <a:t>Interpreta o texto com LLM, apoiada no dicionário de campos, e devolve cada valor com página e trecho de origem. Em desenvolvimento.</a:t>
+              <a:t>Interpreta o texto com LLM, apoiada no dicionário de campos, e devolve cada valor com página e trecho de origem. Publicada; exige chave de modelo no `.env` para rodar.</a:t>
             </a:r>
           </a:p>
         </p:txBody>
@@ -13556,14 +13556,14 @@
         </p:nvSpPr>
         <p:spPr>
           <a:xfrm>
-            <a:off x="640080" y="2194560"/>
-            <a:ext cx="3454298" cy="2651760"/>
+            <a:off x="621792" y="2121851"/>
+            <a:ext cx="3490874" cy="2248538"/>
           </a:xfrm>
           <a:prstGeom prst="rect">
             <a:avLst/>
           </a:prstGeom>
           <a:solidFill>
-            <a:srgbClr val="F5F7F9"/>
+            <a:srgbClr val="E2E8F0"/>
           </a:solidFill>
           <a:ln>
             <a:noFill/>
@@ -13592,16 +13592,40 @@
           </a:p>
         </p:txBody>
       </p:sp>
-      <p:sp>
-        <p:nvSpPr>
-          <p:cNvPr id="8" name="TextBox 7"/>
-          <p:cNvSpPr txBox="1"/>
-          <p:nvPr/>
-        </p:nvSpPr>
-        <p:spPr>
-          <a:xfrm>
-            <a:off x="822960" y="3063240"/>
-            <a:ext cx="3088538" cy="1280160"/>
+      <p:pic>
+        <p:nvPicPr>
+          <p:cNvPr id="8" name="Picture 7" descr="01_comparacao.png"/>
+          <p:cNvPicPr>
+            <a:picLocks noChangeAspect="1"/>
+          </p:cNvPicPr>
+          <p:nvPr/>
+        </p:nvPicPr>
+        <p:blipFill>
+          <a:blip r:embed="rId2"/>
+          <a:stretch>
+            <a:fillRect/>
+          </a:stretch>
+        </p:blipFill>
+        <p:spPr>
+          <a:xfrm>
+            <a:off x="640080" y="2140139"/>
+            <a:ext cx="3454298" cy="2211962"/>
+          </a:xfrm>
+          <a:prstGeom prst="rect">
+            <a:avLst/>
+          </a:prstGeom>
+        </p:spPr>
+      </p:pic>
+      <p:sp>
+        <p:nvSpPr>
+          <p:cNvPr id="9" name="TextBox 8"/>
+          <p:cNvSpPr txBox="1"/>
+          <p:nvPr/>
+        </p:nvSpPr>
+        <p:spPr>
+          <a:xfrm>
+            <a:off x="640080" y="4553712"/>
+            <a:ext cx="3454298" cy="274320"/>
           </a:xfrm>
           <a:prstGeom prst="rect">
             <a:avLst/>
@@ -13620,44 +13644,51 @@
               </a:spcAft>
             </a:pPr>
             <a:r>
-              <a:rPr sz="1200" b="0">
+              <a:rPr sz="1200" b="1">
+                <a:solidFill>
+                  <a:srgbClr val="0D9488"/>
+                </a:solidFill>
+                <a:latin typeface="Segoe UI"/>
+              </a:rPr>
+              <a:t>COMPARAÇÃO</a:t>
+            </a:r>
+          </a:p>
+        </p:txBody>
+      </p:sp>
+      <p:sp>
+        <p:nvSpPr>
+          <p:cNvPr id="10" name="TextBox 9"/>
+          <p:cNvSpPr txBox="1"/>
+          <p:nvPr/>
+        </p:nvSpPr>
+        <p:spPr>
+          <a:xfrm>
+            <a:off x="777240" y="4809744"/>
+            <a:ext cx="3179978" cy="960120"/>
+          </a:xfrm>
+          <a:prstGeom prst="rect">
+            <a:avLst/>
+          </a:prstGeom>
+          <a:noFill/>
+        </p:spPr>
+        <p:txBody>
+          <a:bodyPr wrap="square" anchor="t">
+            <a:spAutoFit/>
+          </a:bodyPr>
+          <a:lstStyle/>
+          <a:p>
+            <a:pPr algn="ctr">
+              <a:spcAft>
+                <a:spcPts val="0"/>
+              </a:spcAft>
+            </a:pPr>
+            <a:r>
+              <a:rPr sz="1100" b="0">
                 <a:solidFill>
                   <a:srgbClr val="64748B"/>
                 </a:solidFill>
                 <a:latin typeface="Segoe UI"/>
               </a:rPr>
-              <a:t>COMPARAÇÃO</a:t>
-            </a:r>
-          </a:p>
-          <a:p>
-            <a:pPr algn="ctr">
-              <a:spcAft>
-                <a:spcPts val="0"/>
-              </a:spcAft>
-            </a:pPr>
-            <a:r>
-              <a:rPr sz="1200" b="0">
-                <a:solidFill>
-                  <a:srgbClr val="64748B"/>
-                </a:solidFill>
-                <a:latin typeface="Segoe UI"/>
-              </a:rPr>
-              <a:t/>
-            </a:r>
-          </a:p>
-          <a:p>
-            <a:pPr algn="ctr">
-              <a:spcAft>
-                <a:spcPts val="0"/>
-              </a:spcAft>
-            </a:pPr>
-            <a:r>
-              <a:rPr sz="1200" b="0">
-                <a:solidFill>
-                  <a:srgbClr val="64748B"/>
-                </a:solidFill>
-                <a:latin typeface="Segoe UI"/>
-              </a:rPr>
               <a:t>As diferenças lado a lado, agrupadas por situação: proteção ausente em uma delas, valores diferentes e redações divergentes.</a:t>
             </a:r>
           </a:p>
@@ -13665,59 +13696,20 @@
       </p:sp>
       <p:sp>
         <p:nvSpPr>
-          <p:cNvPr id="9" name="TextBox 8"/>
-          <p:cNvSpPr txBox="1"/>
-          <p:nvPr/>
-        </p:nvSpPr>
-        <p:spPr>
-          <a:xfrm>
-            <a:off x="640080" y="4937760"/>
-            <a:ext cx="3454298" cy="365760"/>
-          </a:xfrm>
-          <a:prstGeom prst="rect">
-            <a:avLst/>
-          </a:prstGeom>
-          <a:noFill/>
-        </p:spPr>
-        <p:txBody>
-          <a:bodyPr wrap="square" anchor="t">
-            <a:spAutoFit/>
-          </a:bodyPr>
-          <a:lstStyle/>
-          <a:p>
-            <a:pPr algn="ctr">
-              <a:spcAft>
-                <a:spcPts val="0"/>
-              </a:spcAft>
-            </a:pPr>
-            <a:r>
-              <a:rPr sz="1000" b="0">
-                <a:solidFill>
-                  <a:srgbClr val="64748B"/>
-                </a:solidFill>
-                <a:latin typeface="Segoe UI"/>
-              </a:rPr>
-              <a:t>print 1 — colar aqui</a:t>
-            </a:r>
-          </a:p>
-        </p:txBody>
-      </p:sp>
-      <p:sp>
-        <p:nvSpPr>
-          <p:cNvPr id="10" name="Rectangle 9"/>
+          <p:cNvPr id="11" name="Rectangle 10"/>
           <p:cNvSpPr/>
           <p:nvPr/>
         </p:nvSpPr>
         <p:spPr>
           <a:xfrm>
-            <a:off x="4368698" y="2194560"/>
-            <a:ext cx="3454298" cy="2651760"/>
+            <a:off x="4884653" y="2039112"/>
+            <a:ext cx="2422387" cy="2414016"/>
           </a:xfrm>
           <a:prstGeom prst="rect">
             <a:avLst/>
           </a:prstGeom>
           <a:solidFill>
-            <a:srgbClr val="F5F7F9"/>
+            <a:srgbClr val="E2E8F0"/>
           </a:solidFill>
           <a:ln>
             <a:noFill/>
@@ -13746,16 +13738,40 @@
           </a:p>
         </p:txBody>
       </p:sp>
-      <p:sp>
-        <p:nvSpPr>
-          <p:cNvPr id="11" name="TextBox 10"/>
-          <p:cNvSpPr txBox="1"/>
-          <p:nvPr/>
-        </p:nvSpPr>
-        <p:spPr>
-          <a:xfrm>
-            <a:off x="4551578" y="3063240"/>
-            <a:ext cx="3088538" cy="1280160"/>
+      <p:pic>
+        <p:nvPicPr>
+          <p:cNvPr id="12" name="Picture 11" descr="02_de_onde_veio.png"/>
+          <p:cNvPicPr>
+            <a:picLocks noChangeAspect="1"/>
+          </p:cNvPicPr>
+          <p:nvPr/>
+        </p:nvPicPr>
+        <p:blipFill>
+          <a:blip r:embed="rId3"/>
+          <a:stretch>
+            <a:fillRect/>
+          </a:stretch>
+        </p:blipFill>
+        <p:spPr>
+          <a:xfrm>
+            <a:off x="4902941" y="2057400"/>
+            <a:ext cx="2385811" cy="2377440"/>
+          </a:xfrm>
+          <a:prstGeom prst="rect">
+            <a:avLst/>
+          </a:prstGeom>
+        </p:spPr>
+      </p:pic>
+      <p:sp>
+        <p:nvSpPr>
+          <p:cNvPr id="13" name="TextBox 12"/>
+          <p:cNvSpPr txBox="1"/>
+          <p:nvPr/>
+        </p:nvSpPr>
+        <p:spPr>
+          <a:xfrm>
+            <a:off x="4368698" y="4553712"/>
+            <a:ext cx="3454298" cy="274320"/>
           </a:xfrm>
           <a:prstGeom prst="rect">
             <a:avLst/>
@@ -13774,44 +13790,51 @@
               </a:spcAft>
             </a:pPr>
             <a:r>
-              <a:rPr sz="1200" b="0">
+              <a:rPr sz="1200" b="1">
+                <a:solidFill>
+                  <a:srgbClr val="0D9488"/>
+                </a:solidFill>
+                <a:latin typeface="Segoe UI"/>
+              </a:rPr>
+              <a:t>DE ONDE VEIO</a:t>
+            </a:r>
+          </a:p>
+        </p:txBody>
+      </p:sp>
+      <p:sp>
+        <p:nvSpPr>
+          <p:cNvPr id="14" name="TextBox 13"/>
+          <p:cNvSpPr txBox="1"/>
+          <p:nvPr/>
+        </p:nvSpPr>
+        <p:spPr>
+          <a:xfrm>
+            <a:off x="4505858" y="4809744"/>
+            <a:ext cx="3179978" cy="960120"/>
+          </a:xfrm>
+          <a:prstGeom prst="rect">
+            <a:avLst/>
+          </a:prstGeom>
+          <a:noFill/>
+        </p:spPr>
+        <p:txBody>
+          <a:bodyPr wrap="square" anchor="t">
+            <a:spAutoFit/>
+          </a:bodyPr>
+          <a:lstStyle/>
+          <a:p>
+            <a:pPr algn="ctr">
+              <a:spcAft>
+                <a:spcPts val="0"/>
+              </a:spcAft>
+            </a:pPr>
+            <a:r>
+              <a:rPr sz="1100" b="0">
                 <a:solidFill>
                   <a:srgbClr val="64748B"/>
                 </a:solidFill>
                 <a:latin typeface="Segoe UI"/>
               </a:rPr>
-              <a:t>DE ONDE VEIO</a:t>
-            </a:r>
-          </a:p>
-          <a:p>
-            <a:pPr algn="ctr">
-              <a:spcAft>
-                <a:spcPts val="0"/>
-              </a:spcAft>
-            </a:pPr>
-            <a:r>
-              <a:rPr sz="1200" b="0">
-                <a:solidFill>
-                  <a:srgbClr val="64748B"/>
-                </a:solidFill>
-                <a:latin typeface="Segoe UI"/>
-              </a:rPr>
-              <a:t/>
-            </a:r>
-          </a:p>
-          <a:p>
-            <a:pPr algn="ctr">
-              <a:spcAft>
-                <a:spcPts val="0"/>
-              </a:spcAft>
-            </a:pPr>
-            <a:r>
-              <a:rPr sz="1200" b="0">
-                <a:solidFill>
-                  <a:srgbClr val="64748B"/>
-                </a:solidFill>
-                <a:latin typeface="Segoe UI"/>
-              </a:rPr>
               <a:t>Ao clicar num valor, o trecho de origem e a página do PDF renderizada — a conferência acontece sem sair da tela.</a:t>
             </a:r>
           </a:p>
@@ -13819,59 +13842,20 @@
       </p:sp>
       <p:sp>
         <p:nvSpPr>
-          <p:cNvPr id="12" name="TextBox 11"/>
-          <p:cNvSpPr txBox="1"/>
-          <p:nvPr/>
-        </p:nvSpPr>
-        <p:spPr>
-          <a:xfrm>
-            <a:off x="4368698" y="4937760"/>
-            <a:ext cx="3454298" cy="365760"/>
-          </a:xfrm>
-          <a:prstGeom prst="rect">
-            <a:avLst/>
-          </a:prstGeom>
-          <a:noFill/>
-        </p:spPr>
-        <p:txBody>
-          <a:bodyPr wrap="square" anchor="t">
-            <a:spAutoFit/>
-          </a:bodyPr>
-          <a:lstStyle/>
-          <a:p>
-            <a:pPr algn="ctr">
-              <a:spcAft>
-                <a:spcPts val="0"/>
-              </a:spcAft>
-            </a:pPr>
-            <a:r>
-              <a:rPr sz="1000" b="0">
-                <a:solidFill>
-                  <a:srgbClr val="64748B"/>
-                </a:solidFill>
-                <a:latin typeface="Segoe UI"/>
-              </a:rPr>
-              <a:t>print 2 — colar aqui</a:t>
-            </a:r>
-          </a:p>
-        </p:txBody>
-      </p:sp>
-      <p:sp>
-        <p:nvSpPr>
-          <p:cNvPr id="13" name="Rectangle 12"/>
+          <p:cNvPr id="15" name="Rectangle 14"/>
           <p:cNvSpPr/>
           <p:nvPr/>
         </p:nvSpPr>
         <p:spPr>
           <a:xfrm>
-            <a:off x="8097316" y="2194560"/>
-            <a:ext cx="3454298" cy="2651760"/>
+            <a:off x="8079028" y="2335472"/>
+            <a:ext cx="3490874" cy="1821296"/>
           </a:xfrm>
           <a:prstGeom prst="rect">
             <a:avLst/>
           </a:prstGeom>
           <a:solidFill>
-            <a:srgbClr val="F5F7F9"/>
+            <a:srgbClr val="E2E8F0"/>
           </a:solidFill>
           <a:ln>
             <a:noFill/>
@@ -13900,16 +13884,40 @@
           </a:p>
         </p:txBody>
       </p:sp>
-      <p:sp>
-        <p:nvSpPr>
-          <p:cNvPr id="14" name="TextBox 13"/>
-          <p:cNvSpPr txBox="1"/>
-          <p:nvPr/>
-        </p:nvSpPr>
-        <p:spPr>
-          <a:xfrm>
-            <a:off x="8280196" y="3063240"/>
-            <a:ext cx="3088538" cy="1280160"/>
+      <p:pic>
+        <p:nvPicPr>
+          <p:cNvPr id="16" name="Picture 15" descr="03_tabela_csv.png"/>
+          <p:cNvPicPr>
+            <a:picLocks noChangeAspect="1"/>
+          </p:cNvPicPr>
+          <p:nvPr/>
+        </p:nvPicPr>
+        <p:blipFill>
+          <a:blip r:embed="rId4"/>
+          <a:stretch>
+            <a:fillRect/>
+          </a:stretch>
+        </p:blipFill>
+        <p:spPr>
+          <a:xfrm>
+            <a:off x="8097316" y="2353760"/>
+            <a:ext cx="3454298" cy="1784720"/>
+          </a:xfrm>
+          <a:prstGeom prst="rect">
+            <a:avLst/>
+          </a:prstGeom>
+        </p:spPr>
+      </p:pic>
+      <p:sp>
+        <p:nvSpPr>
+          <p:cNvPr id="17" name="TextBox 16"/>
+          <p:cNvSpPr txBox="1"/>
+          <p:nvPr/>
+        </p:nvSpPr>
+        <p:spPr>
+          <a:xfrm>
+            <a:off x="8097316" y="4553712"/>
+            <a:ext cx="3454298" cy="274320"/>
           </a:xfrm>
           <a:prstGeom prst="rect">
             <a:avLst/>
@@ -13928,122 +13936,90 @@
               </a:spcAft>
             </a:pPr>
             <a:r>
-              <a:rPr sz="1200" b="0">
+              <a:rPr sz="1200" b="1">
+                <a:solidFill>
+                  <a:srgbClr val="0D9488"/>
+                </a:solidFill>
+                <a:latin typeface="Segoe UI"/>
+              </a:rPr>
+              <a:t>TABELA E CSV</a:t>
+            </a:r>
+          </a:p>
+        </p:txBody>
+      </p:sp>
+      <p:sp>
+        <p:nvSpPr>
+          <p:cNvPr id="18" name="TextBox 17"/>
+          <p:cNvSpPr txBox="1"/>
+          <p:nvPr/>
+        </p:nvSpPr>
+        <p:spPr>
+          <a:xfrm>
+            <a:off x="8234476" y="4809744"/>
+            <a:ext cx="3179978" cy="960120"/>
+          </a:xfrm>
+          <a:prstGeom prst="rect">
+            <a:avLst/>
+          </a:prstGeom>
+          <a:noFill/>
+        </p:spPr>
+        <p:txBody>
+          <a:bodyPr wrap="square" anchor="t">
+            <a:spAutoFit/>
+          </a:bodyPr>
+          <a:lstStyle/>
+          <a:p>
+            <a:pPr algn="ctr">
+              <a:spcAft>
+                <a:spcPts val="0"/>
+              </a:spcAft>
+            </a:pPr>
+            <a:r>
+              <a:rPr sz="1100" b="0">
                 <a:solidFill>
                   <a:srgbClr val="64748B"/>
                 </a:solidFill>
                 <a:latin typeface="Segoe UI"/>
               </a:rPr>
-              <a:t>TABELA E CSV</a:t>
-            </a:r>
-          </a:p>
-          <a:p>
-            <a:pPr algn="ctr">
+              <a:t>A comparação inteira, campo a campo, com a situação colorida e saída em CSV pronta para o Excel.</a:t>
+            </a:r>
+          </a:p>
+        </p:txBody>
+      </p:sp>
+      <p:sp>
+        <p:nvSpPr>
+          <p:cNvPr id="19" name="TextBox 18"/>
+          <p:cNvSpPr txBox="1"/>
+          <p:nvPr/>
+        </p:nvSpPr>
+        <p:spPr>
+          <a:xfrm>
+            <a:off x="640080" y="5852160"/>
+            <a:ext cx="10881360" cy="457200"/>
+          </a:xfrm>
+          <a:prstGeom prst="rect">
+            <a:avLst/>
+          </a:prstGeom>
+          <a:noFill/>
+        </p:spPr>
+        <p:txBody>
+          <a:bodyPr wrap="square" anchor="t">
+            <a:spAutoFit/>
+          </a:bodyPr>
+          <a:lstStyle/>
+          <a:p>
+            <a:pPr algn="l">
               <a:spcAft>
                 <a:spcPts val="0"/>
               </a:spcAft>
             </a:pPr>
             <a:r>
-              <a:rPr sz="1200" b="0">
+              <a:rPr sz="1000" b="0">
                 <a:solidFill>
                   <a:srgbClr val="64748B"/>
                 </a:solidFill>
                 <a:latin typeface="Segoe UI"/>
               </a:rPr>
-              <a:t/>
-            </a:r>
-          </a:p>
-          <a:p>
-            <a:pPr algn="ctr">
-              <a:spcAft>
-                <a:spcPts val="0"/>
-              </a:spcAft>
-            </a:pPr>
-            <a:r>
-              <a:rPr sz="1200" b="0">
-                <a:solidFill>
-                  <a:srgbClr val="64748B"/>
-                </a:solidFill>
-                <a:latin typeface="Segoe UI"/>
-              </a:rPr>
-              <a:t>A comparação inteira, campo a campo, com a situação colorida e saída em CSV pronta para o Excel.</a:t>
-            </a:r>
-          </a:p>
-        </p:txBody>
-      </p:sp>
-      <p:sp>
-        <p:nvSpPr>
-          <p:cNvPr id="15" name="TextBox 14"/>
-          <p:cNvSpPr txBox="1"/>
-          <p:nvPr/>
-        </p:nvSpPr>
-        <p:spPr>
-          <a:xfrm>
-            <a:off x="8097316" y="4937760"/>
-            <a:ext cx="3454298" cy="365760"/>
-          </a:xfrm>
-          <a:prstGeom prst="rect">
-            <a:avLst/>
-          </a:prstGeom>
-          <a:noFill/>
-        </p:spPr>
-        <p:txBody>
-          <a:bodyPr wrap="square" anchor="t">
-            <a:spAutoFit/>
-          </a:bodyPr>
-          <a:lstStyle/>
-          <a:p>
-            <a:pPr algn="ctr">
-              <a:spcAft>
-                <a:spcPts val="0"/>
-              </a:spcAft>
-            </a:pPr>
-            <a:r>
-              <a:rPr sz="1000" b="0">
-                <a:solidFill>
-                  <a:srgbClr val="64748B"/>
-                </a:solidFill>
-                <a:latin typeface="Segoe UI"/>
-              </a:rPr>
-              <a:t>print 3 — colar aqui</a:t>
-            </a:r>
-          </a:p>
-        </p:txBody>
-      </p:sp>
-      <p:sp>
-        <p:nvSpPr>
-          <p:cNvPr id="16" name="TextBox 15"/>
-          <p:cNvSpPr txBox="1"/>
-          <p:nvPr/>
-        </p:nvSpPr>
-        <p:spPr>
-          <a:xfrm>
-            <a:off x="640080" y="5532120"/>
-            <a:ext cx="10881360" cy="640080"/>
-          </a:xfrm>
-          <a:prstGeom prst="rect">
-            <a:avLst/>
-          </a:prstGeom>
-          <a:noFill/>
-        </p:spPr>
-        <p:txBody>
-          <a:bodyPr wrap="square" anchor="t">
-            <a:spAutoFit/>
-          </a:bodyPr>
-          <a:lstStyle/>
-          <a:p>
-            <a:pPr algn="l">
-              <a:spcAft>
-                <a:spcPts val="0"/>
-              </a:spcAft>
-            </a:pPr>
-            <a:r>
-              <a:rPr sz="1100" b="0">
-                <a:solidFill>
-                  <a:srgbClr val="64748B"/>
-                </a:solidFill>
-                <a:latin typeface="Segoe UI"/>
-              </a:rPr>
               <a:t>Rodar: `streamlit run app/interface/app.py` · a demonstração também funciona por linha de comando (`python -m scripts.demo_frente_d`), para o vídeo não depender do navegador.</a:t>
             </a:r>
           </a:p>
@@ -14051,7 +14027,7 @@
       </p:sp>
       <p:sp>
         <p:nvSpPr>
-          <p:cNvPr id="17" name="TextBox 16"/>
+          <p:cNvPr id="20" name="TextBox 19"/>
           <p:cNvSpPr txBox="1"/>
           <p:nvPr/>
         </p:nvSpPr>
@@ -14090,7 +14066,7 @@
       </p:sp>
       <p:sp>
         <p:nvSpPr>
-          <p:cNvPr id="18" name="TextBox 17"/>
+          <p:cNvPr id="21" name="TextBox 20"/>
           <p:cNvSpPr txBox="1"/>
           <p:nvPr/>
         </p:nvSpPr>
@@ -14345,7 +14321,7 @@
                 </a:solidFill>
                 <a:latin typeface="Segoe UI"/>
               </a:rPr>
-              <a:t>Saída do motor de comparação na demonstração registrada no repositório.</a:t>
+              <a:t>Saída do motor de comparação sobre as extrações de exemplo da demonstração.</a:t>
             </a:r>
           </a:p>
         </p:txBody>
@@ -15204,7 +15180,7 @@
                 </a:solidFill>
                 <a:latin typeface="Segoe UI"/>
               </a:rPr>
-              <a:t>Medido sobre as extrações de exemplo, enquanto a frente B (extração com LLM) não está pronta. Ingestão, banco, comparação e rastreabilidade são reais e estão no código; quando a extração real entrar, a tela não muda — é isso que os exemplos garantiram.</a:t>
+              <a:t>Medido sobre as extrações de exemplo, porque os campos numéricos não têm valor nas condições gerais comparadas — elas remetem cada um à Especificação da Apólice, como o slide de limitações documenta. Ingestão, banco, comparação e rastreabilidade são reais e estão no código; trocar a fonte dos campos não muda a tela — é isso que os exemplos garantiram.</a:t>
             </a:r>
           </a:p>
         </p:txBody>

--- a/Projeto_Final_Artefatos/InsurMinds_Projeto_Final.pptx
+++ b/Projeto_Final_Artefatos/InsurMinds_Projeto_Final.pptx
@@ -13556,8 +13556,8 @@
         </p:nvSpPr>
         <p:spPr>
           <a:xfrm>
-            <a:off x="621792" y="2121851"/>
-            <a:ext cx="3490874" cy="2248538"/>
+            <a:off x="621792" y="2149121"/>
+            <a:ext cx="3490874" cy="2193997"/>
           </a:xfrm>
           <a:prstGeom prst="rect">
             <a:avLst/>
@@ -13608,8 +13608,8 @@
         </p:blipFill>
         <p:spPr>
           <a:xfrm>
-            <a:off x="640080" y="2140139"/>
-            <a:ext cx="3454298" cy="2211962"/>
+            <a:off x="640080" y="2167409"/>
+            <a:ext cx="3454298" cy="2157421"/>
           </a:xfrm>
           <a:prstGeom prst="rect">
             <a:avLst/>
@@ -13702,8 +13702,8 @@
         </p:nvSpPr>
         <p:spPr>
           <a:xfrm>
-            <a:off x="4884653" y="2039112"/>
-            <a:ext cx="2422387" cy="2414016"/>
+            <a:off x="4885703" y="2039112"/>
+            <a:ext cx="2420288" cy="2414016"/>
           </a:xfrm>
           <a:prstGeom prst="rect">
             <a:avLst/>
@@ -13754,8 +13754,8 @@
         </p:blipFill>
         <p:spPr>
           <a:xfrm>
-            <a:off x="4902941" y="2057400"/>
-            <a:ext cx="2385811" cy="2377440"/>
+            <a:off x="4903991" y="2057400"/>
+            <a:ext cx="2383712" cy="2377440"/>
           </a:xfrm>
           <a:prstGeom prst="rect">
             <a:avLst/>

--- a/Projeto_Final_Artefatos/InsurMinds_Projeto_Final.pptx
+++ b/Projeto_Final_Artefatos/InsurMinds_Projeto_Final.pptx
@@ -13556,8 +13556,8 @@
         </p:nvSpPr>
         <p:spPr>
           <a:xfrm>
-            <a:off x="621792" y="2149121"/>
-            <a:ext cx="3490874" cy="2193997"/>
+            <a:off x="836025" y="2039112"/>
+            <a:ext cx="3062408" cy="2414016"/>
           </a:xfrm>
           <a:prstGeom prst="rect">
             <a:avLst/>
@@ -13608,8 +13608,8 @@
         </p:blipFill>
         <p:spPr>
           <a:xfrm>
-            <a:off x="640080" y="2167409"/>
-            <a:ext cx="3454298" cy="2157421"/>
+            <a:off x="854313" y="2057400"/>
+            <a:ext cx="3025832" cy="2377440"/>
           </a:xfrm>
           <a:prstGeom prst="rect">
             <a:avLst/>
@@ -13702,8 +13702,8 @@
         </p:nvSpPr>
         <p:spPr>
           <a:xfrm>
-            <a:off x="4885703" y="2039112"/>
-            <a:ext cx="2420288" cy="2414016"/>
+            <a:off x="4350410" y="2110265"/>
+            <a:ext cx="3490874" cy="2271710"/>
           </a:xfrm>
           <a:prstGeom prst="rect">
             <a:avLst/>
@@ -13754,8 +13754,8 @@
         </p:blipFill>
         <p:spPr>
           <a:xfrm>
-            <a:off x="4903991" y="2057400"/>
-            <a:ext cx="2383712" cy="2377440"/>
+            <a:off x="4368698" y="2128553"/>
+            <a:ext cx="3454298" cy="2235134"/>
           </a:xfrm>
           <a:prstGeom prst="rect">
             <a:avLst/>
@@ -13848,8 +13848,8 @@
         </p:nvSpPr>
         <p:spPr>
           <a:xfrm>
-            <a:off x="8079028" y="2335472"/>
-            <a:ext cx="3490874" cy="1821296"/>
+            <a:off x="8293261" y="2039112"/>
+            <a:ext cx="3062408" cy="2414016"/>
           </a:xfrm>
           <a:prstGeom prst="rect">
             <a:avLst/>
@@ -13900,8 +13900,8 @@
         </p:blipFill>
         <p:spPr>
           <a:xfrm>
-            <a:off x="8097316" y="2353760"/>
-            <a:ext cx="3454298" cy="1784720"/>
+            <a:off x="8311549" y="2057400"/>
+            <a:ext cx="3025832" cy="2377440"/>
           </a:xfrm>
           <a:prstGeom prst="rect">
             <a:avLst/>

--- a/Projeto_Final_Artefatos/InsurMinds_Projeto_Final.pptx
+++ b/Projeto_Final_Artefatos/InsurMinds_Projeto_Final.pptx
@@ -9627,7 +9627,7 @@
                 </a:solidFill>
                 <a:latin typeface="Segoe UI"/>
               </a:rPr>
-              <a:t>B · EXTRAÇÃO</a:t>
+              <a:t>B · EXTRAÇÃO E REDAÇÃO</a:t>
             </a:r>
           </a:p>
         </p:txBody>
@@ -9666,7 +9666,7 @@
                 </a:solidFill>
                 <a:latin typeface="Segoe UI"/>
               </a:rPr>
-              <a:t>Interpreta o texto com LLM, apoiada no dicionário de campos, e devolve cada valor com página e trecho de origem. Publicada; exige chave de modelo no `.env` para rodar.</a:t>
+              <a:t>Interpreta o texto com LLM, apoiada no dicionário de campos, e devolve cada valor com página e trecho de origem. O redator escreve o que difere, e só afirma diferença quando cita as duas apólices.</a:t>
             </a:r>
           </a:p>
         </p:txBody>
@@ -9949,7 +9949,7 @@
                 </a:solidFill>
                 <a:latin typeface="Segoe UI"/>
               </a:rPr>
-              <a:t>Frentes A e C: Daniel Ramon · frente B: Nicole Paes · dicionário de campos: Paulo Henrique · frente D: Paulo Roberto. A separação existe para que cada parte possa ser testada sozinha — e para que a explicação em texto (LLM) nunca contamine a comparação, que precisa ser reprodutível.</a:t>
+              <a:t>Frentes A e C: Daniel Ramon · frente B: Nicole Paes · dicionário de campos: Paulo Henrique · frente D: Paulo Roberto. A separação existe para que cada parte possa ser testada sozinha — e para que a explicação em texto (LLM) nunca contamine a comparação, que precisa ser reprodutível. É o que permite 259 testes automatizados sem tocar a rede: tudo o que é decisão de negócio é determinístico.</a:t>
             </a:r>
           </a:p>
         </p:txBody>

--- a/Projeto_Final_Artefatos/InsurMinds_Projeto_Final.pptx
+++ b/Projeto_Final_Artefatos/InsurMinds_Projeto_Final.pptx
@@ -3266,7 +3266,7 @@
                 </a:solidFill>
                 <a:latin typeface="Segoe UI"/>
               </a:rPr>
-              <a:t>CURSO INSUMINS · I2A2 — PROJETO FINAL</a:t>
+              <a:t>CURSO INSURMINDS · I2A2 — PROJETO FINAL</a:t>
             </a:r>
           </a:p>
         </p:txBody>
@@ -3415,7 +3415,7 @@
                 </a:solidFill>
                 <a:latin typeface="Segoe UI"/>
               </a:rPr>
-              <a:t>Grupo Insurminds · Daniel Ramon, Paulo Henrique, Nicole Paes, Paulo Roberto e Juliana Catarina</a:t>
+              <a:t>Grupo Jarvis · Daniel Ramon, Paulo Henrique, Nicole Paes, Paulo Roberto e Juliana Catarina</a:t>
             </a:r>
           </a:p>
           <a:p>
@@ -4662,7 +4662,7 @@
                 </a:solidFill>
                 <a:latin typeface="Segoe UI"/>
               </a:rPr>
-              <a:t>Plataforma de análise e comparação de apólices D&amp;O · grupo Insurminds / I2A2</a:t>
+              <a:t>Plataforma de análise e comparação de apólices D&amp;O · grupo Jarvis / I2A2</a:t>
             </a:r>
           </a:p>
         </p:txBody>
@@ -5635,7 +5635,7 @@
                 </a:solidFill>
                 <a:latin typeface="Segoe UI"/>
               </a:rPr>
-              <a:t>Plataforma de análise e comparação de apólices D&amp;O · grupo Insurminds / I2A2</a:t>
+              <a:t>Plataforma de análise e comparação de apólices D&amp;O · grupo Jarvis / I2A2</a:t>
             </a:r>
           </a:p>
         </p:txBody>
@@ -6569,7 +6569,7 @@
                 </a:solidFill>
                 <a:latin typeface="Segoe UI"/>
               </a:rPr>
-              <a:t>Plataforma de análise e comparação de apólices D&amp;O · grupo Insurminds / I2A2</a:t>
+              <a:t>Plataforma de análise e comparação de apólices D&amp;O · grupo Jarvis / I2A2</a:t>
             </a:r>
           </a:p>
         </p:txBody>
@@ -7382,7 +7382,7 @@
                 </a:solidFill>
                 <a:latin typeface="Segoe UI"/>
               </a:rPr>
-              <a:t>Plataforma de análise e comparação de apólices D&amp;O · grupo Insurminds / I2A2</a:t>
+              <a:t>Plataforma de análise e comparação de apólices D&amp;O · grupo Jarvis / I2A2</a:t>
             </a:r>
           </a:p>
         </p:txBody>
@@ -8355,7 +8355,7 @@
                 </a:solidFill>
                 <a:latin typeface="Segoe UI"/>
               </a:rPr>
-              <a:t>Plataforma de análise e comparação de apólices D&amp;O · grupo Insurminds / I2A2</a:t>
+              <a:t>Plataforma de análise e comparação de apólices D&amp;O · grupo Jarvis / I2A2</a:t>
             </a:r>
           </a:p>
         </p:txBody>
@@ -9160,7 +9160,7 @@
                 </a:solidFill>
                 <a:latin typeface="Segoe UI"/>
               </a:rPr>
-              <a:t>Plataforma de análise e comparação de apólices D&amp;O · grupo Insurminds / I2A2</a:t>
+              <a:t>Plataforma de análise e comparação de apólices D&amp;O · grupo Jarvis / I2A2</a:t>
             </a:r>
           </a:p>
         </p:txBody>
@@ -9988,7 +9988,7 @@
                 </a:solidFill>
                 <a:latin typeface="Segoe UI"/>
               </a:rPr>
-              <a:t>Plataforma de análise e comparação de apólices D&amp;O · grupo Insurminds / I2A2</a:t>
+              <a:t>Plataforma de análise e comparação de apólices D&amp;O · grupo Jarvis / I2A2</a:t>
             </a:r>
           </a:p>
         </p:txBody>
@@ -10961,7 +10961,7 @@
                 </a:solidFill>
                 <a:latin typeface="Segoe UI"/>
               </a:rPr>
-              <a:t>Plataforma de análise e comparação de apólices D&amp;O · grupo Insurminds / I2A2</a:t>
+              <a:t>Plataforma de análise e comparação de apólices D&amp;O · grupo Jarvis / I2A2</a:t>
             </a:r>
           </a:p>
         </p:txBody>
@@ -12121,7 +12121,7 @@
                 </a:solidFill>
                 <a:latin typeface="Segoe UI"/>
               </a:rPr>
-              <a:t>Plataforma de análise e comparação de apólices D&amp;O · grupo Insurminds / I2A2</a:t>
+              <a:t>Plataforma de análise e comparação de apólices D&amp;O · grupo Jarvis / I2A2</a:t>
             </a:r>
           </a:p>
         </p:txBody>
@@ -13281,7 +13281,7 @@
                 </a:solidFill>
                 <a:latin typeface="Segoe UI"/>
               </a:rPr>
-              <a:t>Plataforma de análise e comparação de apólices D&amp;O · grupo Insurminds / I2A2</a:t>
+              <a:t>Plataforma de análise e comparação de apólices D&amp;O · grupo Jarvis / I2A2</a:t>
             </a:r>
           </a:p>
         </p:txBody>
@@ -14059,7 +14059,7 @@
                 </a:solidFill>
                 <a:latin typeface="Segoe UI"/>
               </a:rPr>
-              <a:t>Plataforma de análise e comparação de apólices D&amp;O · grupo Insurminds / I2A2</a:t>
+              <a:t>Plataforma de análise e comparação de apólices D&amp;O · grupo Jarvis / I2A2</a:t>
             </a:r>
           </a:p>
         </p:txBody>
@@ -15219,7 +15219,7 @@
                 </a:solidFill>
                 <a:latin typeface="Segoe UI"/>
               </a:rPr>
-              <a:t>Plataforma de análise e comparação de apólices D&amp;O · grupo Insurminds / I2A2</a:t>
+              <a:t>Plataforma de análise e comparação de apólices D&amp;O · grupo Jarvis / I2A2</a:t>
             </a:r>
           </a:p>
         </p:txBody>
